--- a/Theory/Week 3 Theory.pptx
+++ b/Theory/Week 3 Theory.pptx
@@ -23126,14 +23126,21 @@
               <a:buNone/>
             </a:pPr>
             <a:r>
-              <a:rPr lang="en-US" sz="1800" b="1" dirty="0"/>
-              <a:t>World Space (brief mention)</a:t>
-            </a:r>
-          </a:p>
-          <a:p>
+              <a:rPr lang="en-US" sz="1800" b="1"/>
+              <a:t>World Space</a:t>
+            </a:r>
+          </a:p>
+          <a:p>
+            <a:pPr marL="114300" indent="0">
+              <a:buNone/>
+            </a:pPr>
+            <a:r>
+              <a:rPr lang="en-US" sz="1800"/>
+              <a:t>UI </a:t>
+            </a:r>
             <a:r>
               <a:rPr lang="en-US" sz="1800" dirty="0"/>
-              <a:t>UI behaves like a 3D object in the scene. Can be placed in the world (like floating health bar above enemy).</a:t>
+              <a:t>behaves like a 3D object in the scene. Can be placed in the world (like floating health bar above enemy).</a:t>
             </a:r>
           </a:p>
         </p:txBody>
